--- a/special/academia/HKUST/TEMG 3950/assignment W12/W11 Organizational Analysis (DRW).pptx
+++ b/special/academia/HKUST/TEMG 3950/assignment W12/W11 Organizational Analysis (DRW).pptx
@@ -202,7 +202,7 @@
           <a:p>
             <a:fld id="{FA9E21C8-8908-4BD4-8661-2A47E8F4249E}" type="datetimeFigureOut">
               <a:rPr lang="zh-HK" altLang="en-US" smtClean="0"/>
-              <a:t>21/4/2024</a:t>
+              <a:t>24/6/2024</a:t>
             </a:fld>
             <a:endParaRPr lang="zh-HK" altLang="en-US"/>
           </a:p>
@@ -787,7 +787,7 @@
           <a:p>
             <a:fld id="{2C7C8946-FA19-4747-8649-F6BD4CD27D46}" type="datetimeFigureOut">
               <a:rPr lang="zh-HK" altLang="en-US" smtClean="0"/>
-              <a:t>21/4/2024</a:t>
+              <a:t>24/6/2024</a:t>
             </a:fld>
             <a:endParaRPr lang="zh-HK" altLang="en-US"/>
           </a:p>
@@ -987,7 +987,7 @@
           <a:p>
             <a:fld id="{2C7C8946-FA19-4747-8649-F6BD4CD27D46}" type="datetimeFigureOut">
               <a:rPr lang="zh-HK" altLang="en-US" smtClean="0"/>
-              <a:t>21/4/2024</a:t>
+              <a:t>24/6/2024</a:t>
             </a:fld>
             <a:endParaRPr lang="zh-HK" altLang="en-US"/>
           </a:p>
@@ -1197,7 +1197,7 @@
           <a:p>
             <a:fld id="{2C7C8946-FA19-4747-8649-F6BD4CD27D46}" type="datetimeFigureOut">
               <a:rPr lang="zh-HK" altLang="en-US" smtClean="0"/>
-              <a:t>21/4/2024</a:t>
+              <a:t>24/6/2024</a:t>
             </a:fld>
             <a:endParaRPr lang="zh-HK" altLang="en-US"/>
           </a:p>
@@ -1397,7 +1397,7 @@
           <a:p>
             <a:fld id="{2C7C8946-FA19-4747-8649-F6BD4CD27D46}" type="datetimeFigureOut">
               <a:rPr lang="zh-HK" altLang="en-US" smtClean="0"/>
-              <a:t>21/4/2024</a:t>
+              <a:t>24/6/2024</a:t>
             </a:fld>
             <a:endParaRPr lang="zh-HK" altLang="en-US"/>
           </a:p>
@@ -1673,7 +1673,7 @@
           <a:p>
             <a:fld id="{2C7C8946-FA19-4747-8649-F6BD4CD27D46}" type="datetimeFigureOut">
               <a:rPr lang="zh-HK" altLang="en-US" smtClean="0"/>
-              <a:t>21/4/2024</a:t>
+              <a:t>24/6/2024</a:t>
             </a:fld>
             <a:endParaRPr lang="zh-HK" altLang="en-US"/>
           </a:p>
@@ -1941,7 +1941,7 @@
           <a:p>
             <a:fld id="{2C7C8946-FA19-4747-8649-F6BD4CD27D46}" type="datetimeFigureOut">
               <a:rPr lang="zh-HK" altLang="en-US" smtClean="0"/>
-              <a:t>21/4/2024</a:t>
+              <a:t>24/6/2024</a:t>
             </a:fld>
             <a:endParaRPr lang="zh-HK" altLang="en-US"/>
           </a:p>
@@ -2356,7 +2356,7 @@
           <a:p>
             <a:fld id="{2C7C8946-FA19-4747-8649-F6BD4CD27D46}" type="datetimeFigureOut">
               <a:rPr lang="zh-HK" altLang="en-US" smtClean="0"/>
-              <a:t>21/4/2024</a:t>
+              <a:t>24/6/2024</a:t>
             </a:fld>
             <a:endParaRPr lang="zh-HK" altLang="en-US"/>
           </a:p>
@@ -2498,7 +2498,7 @@
           <a:p>
             <a:fld id="{2C7C8946-FA19-4747-8649-F6BD4CD27D46}" type="datetimeFigureOut">
               <a:rPr lang="zh-HK" altLang="en-US" smtClean="0"/>
-              <a:t>21/4/2024</a:t>
+              <a:t>24/6/2024</a:t>
             </a:fld>
             <a:endParaRPr lang="zh-HK" altLang="en-US"/>
           </a:p>
@@ -2611,7 +2611,7 @@
           <a:p>
             <a:fld id="{2C7C8946-FA19-4747-8649-F6BD4CD27D46}" type="datetimeFigureOut">
               <a:rPr lang="zh-HK" altLang="en-US" smtClean="0"/>
-              <a:t>21/4/2024</a:t>
+              <a:t>24/6/2024</a:t>
             </a:fld>
             <a:endParaRPr lang="zh-HK" altLang="en-US"/>
           </a:p>
@@ -2924,7 +2924,7 @@
           <a:p>
             <a:fld id="{2C7C8946-FA19-4747-8649-F6BD4CD27D46}" type="datetimeFigureOut">
               <a:rPr lang="zh-HK" altLang="en-US" smtClean="0"/>
-              <a:t>21/4/2024</a:t>
+              <a:t>24/6/2024</a:t>
             </a:fld>
             <a:endParaRPr lang="zh-HK" altLang="en-US"/>
           </a:p>
@@ -3213,7 +3213,7 @@
           <a:p>
             <a:fld id="{2C7C8946-FA19-4747-8649-F6BD4CD27D46}" type="datetimeFigureOut">
               <a:rPr lang="zh-HK" altLang="en-US" smtClean="0"/>
-              <a:t>21/4/2024</a:t>
+              <a:t>24/6/2024</a:t>
             </a:fld>
             <a:endParaRPr lang="zh-HK" altLang="en-US"/>
           </a:p>
@@ -3456,7 +3456,7 @@
           <a:p>
             <a:fld id="{2C7C8946-FA19-4747-8649-F6BD4CD27D46}" type="datetimeFigureOut">
               <a:rPr lang="zh-HK" altLang="en-US" smtClean="0"/>
-              <a:t>21/4/2024</a:t>
+              <a:t>24/6/2024</a:t>
             </a:fld>
             <a:endParaRPr lang="zh-HK" altLang="en-US"/>
           </a:p>
@@ -3925,23 +3925,7 @@
           <a:p>
             <a:r>
               <a:rPr lang="en-US" altLang="zh-HK" dirty="0"/>
-              <a:t>So</a:t>
-            </a:r>
-            <a:r>
-              <a:rPr lang="zh-TW" altLang="en-US" dirty="0"/>
-              <a:t> </a:t>
-            </a:r>
-            <a:r>
-              <a:rPr lang="en-US" altLang="zh-TW" dirty="0"/>
-              <a:t>Chun</a:t>
-            </a:r>
-            <a:r>
-              <a:rPr lang="zh-TW" altLang="en-US" dirty="0"/>
-              <a:t> </a:t>
-            </a:r>
-            <a:r>
-              <a:rPr lang="en-US" altLang="zh-TW" dirty="0"/>
-              <a:t>Hin</a:t>
+              <a:t>William So</a:t>
             </a:r>
             <a:endParaRPr lang="zh-HK" altLang="en-US" dirty="0"/>
           </a:p>
